--- a/assets/companions/who-pays-if-its-wrong.pptx
+++ b/assets/companions/who-pays-if-its-wrong.pptx
@@ -2766,150 +2766,261 @@
           <a:chExt cx="0" cy="0"/>
         </a:xfrm>
       </p:grpSpPr>
-      <p:sp>
-        <p:nvSpPr>
-          <p:cNvPr id="2" name="Text 0"/>
-          <p:cNvSpPr txBox="1"/>
-          <p:nvPr/>
-        </p:nvSpPr>
-        <p:spPr>
-          <a:xfrm>
-            <a:off x="621792" y="658368"/>
-            <a:ext cx="6400800" cy="310896"/>
-          </a:xfrm>
-          <a:prstGeom prst="rect">
-            <a:avLst/>
-          </a:prstGeom>
-          <a:noFill/>
-          <a:ln/>
-        </p:spPr>
-        <p:txBody>
-          <a:bodyPr wrap="square" lIns="0" tIns="0" rIns="0" bIns="0" rtlCol="0" anchor="ctr"/>
-          <a:lstStyle/>
-          <a:p>
-            <a:pPr indent="0" marL="0">
-              <a:buNone/>
-            </a:pPr>
-            <a:r>
-              <a:rPr lang="en-US" sz="1200" b="1" spc="300" kern="0" dirty="0">
-                <a:solidFill>
-                  <a:srgbClr val="F47920"/>
-                </a:solidFill>
-                <a:latin typeface="Trebuchet MS" pitchFamily="34" charset="0"/>
-                <a:ea typeface="Trebuchet MS" pitchFamily="34" charset="-122"/>
-                <a:cs typeface="Trebuchet MS" pitchFamily="34" charset="-120"/>
-              </a:rPr>
-              <a:t>ARCHITECTURE &amp; ATTENTION</a:t>
-            </a:r>
-            <a:endParaRPr lang="en-US" sz="1200" dirty="0"/>
-          </a:p>
-        </p:txBody>
-      </p:sp>
-      <p:sp>
-        <p:nvSpPr>
-          <p:cNvPr id="3" name="Text 1"/>
-          <p:cNvSpPr txBox="1"/>
-          <p:nvPr/>
-        </p:nvSpPr>
-        <p:spPr>
-          <a:xfrm>
-            <a:off x="621792" y="1691640"/>
-            <a:ext cx="6858000" cy="2103120"/>
-          </a:xfrm>
-          <a:prstGeom prst="rect">
-            <a:avLst/>
-          </a:prstGeom>
-          <a:noFill/>
-          <a:ln/>
-        </p:spPr>
-        <p:txBody>
-          <a:bodyPr wrap="square" lIns="0" tIns="0" rIns="0" bIns="0" rtlCol="0" anchor="t"/>
-          <a:lstStyle/>
-          <a:p>
-            <a:pPr indent="0" marL="0">
-              <a:buNone/>
-            </a:pPr>
-            <a:r>
-              <a:rPr lang="en-US" sz="4600" b="1" dirty="0">
-                <a:solidFill>
-                  <a:srgbClr val="FFFFFF"/>
-                </a:solidFill>
-                <a:latin typeface="Georgia" pitchFamily="34" charset="0"/>
-                <a:ea typeface="Georgia" pitchFamily="34" charset="-122"/>
-                <a:cs typeface="Georgia" pitchFamily="34" charset="-120"/>
-              </a:rPr>
-              <a:t>Who Pays If It’s Wrong?</a:t>
-            </a:r>
-            <a:endParaRPr lang="en-US" sz="4600" dirty="0"/>
-          </a:p>
-        </p:txBody>
-      </p:sp>
-      <p:sp>
-        <p:nvSpPr>
-          <p:cNvPr id="4" name="Text 2"/>
-          <p:cNvSpPr txBox="1"/>
-          <p:nvPr/>
-        </p:nvSpPr>
-        <p:spPr>
-          <a:xfrm>
-            <a:off x="621792" y="3931920"/>
-            <a:ext cx="7132320" cy="1737360"/>
-          </a:xfrm>
-          <a:prstGeom prst="rect">
-            <a:avLst/>
-          </a:prstGeom>
-          <a:noFill/>
-          <a:ln/>
-        </p:spPr>
-        <p:txBody>
-          <a:bodyPr wrap="square" lIns="0" tIns="0" rIns="0" bIns="0" rtlCol="0" anchor="t"/>
-          <a:lstStyle/>
-          <a:p>
-            <a:pPr indent="0" marL="0">
-              <a:lnSpc>
-                <a:spcPct val="130000"/>
-              </a:lnSpc>
-              <a:buNone/>
-            </a:pPr>
-            <a:r>
-              <a:rPr lang="en-US" sz="1700" dirty="0">
-                <a:solidFill>
-                  <a:srgbClr val="B9C4D0"/>
-                </a:solidFill>
-                <a:latin typeface="Trebuchet MS" pitchFamily="34" charset="0"/>
-                <a:ea typeface="Trebuchet MS" pitchFamily="34" charset="-122"/>
-                <a:cs typeface="Trebuchet MS" pitchFamily="34" charset="-120"/>
-              </a:rPr>
-              <a:t>Hundreds of billions of dollars are riding on a particular bet about how AI gets better. The bet may well come off. This is about what happens to everybody else if it does not.</a:t>
-            </a:r>
-            <a:endParaRPr lang="en-US" sz="1700" dirty="0"/>
-          </a:p>
-        </p:txBody>
-      </p:sp>
       <p:pic>
         <p:nvPicPr>
-          <p:cNvPr id="5" name="brand-mark" descr="/tmp/claude-0/-home-claude/840a28d2-2874-58f2-bea9-3fe61a55262a/scratchpad/musicdeck/logo.png">    </p:cNvPr>
+          <p:cNvPr id="7" name="Picture 6" descr="cover_05.jpg"/>
           <p:cNvPicPr>
             <a:picLocks noChangeAspect="1"/>
           </p:cNvPicPr>
           <p:nvPr/>
         </p:nvPicPr>
         <p:blipFill>
-          <a:blip r:embed="rId1"/>
+          <a:blip r:embed="rId4"/>
           <a:stretch>
             <a:fillRect/>
           </a:stretch>
         </p:blipFill>
         <p:spPr>
           <a:xfrm>
-            <a:off x="8641080" y="1920240"/>
-            <a:ext cx="2926080" cy="2926080"/>
+            <a:off x="-18288" y="-18288"/>
+            <a:ext cx="12228545" cy="6894576"/>
           </a:xfrm>
           <a:prstGeom prst="rect">
             <a:avLst/>
           </a:prstGeom>
         </p:spPr>
       </p:pic>
+      <p:sp>
+        <p:nvSpPr>
+          <p:cNvPr id="8" name="Rectangle 7"/>
+          <p:cNvSpPr/>
+          <p:nvPr/>
+        </p:nvSpPr>
+        <p:spPr>
+          <a:xfrm>
+            <a:off x="0" y="0"/>
+            <a:ext cx="12191969" cy="6858000"/>
+          </a:xfrm>
+          <a:prstGeom prst="rect">
+            <a:avLst/>
+          </a:prstGeom>
+          <a:solidFill>
+            <a:srgbClr val="000000">
+              <a:alpha val="20000"/>
+            </a:srgbClr>
+          </a:solidFill>
+          <a:ln>
+            <a:noFill/>
+          </a:ln>
+          <a:effectLst/>
+        </p:spPr>
+        <p:style>
+          <a:lnRef idx="1">
+            <a:schemeClr val="accent1"/>
+          </a:lnRef>
+          <a:fillRef idx="3">
+            <a:schemeClr val="accent1"/>
+          </a:fillRef>
+          <a:effectRef idx="2">
+            <a:schemeClr val="accent1"/>
+          </a:effectRef>
+          <a:fontRef idx="minor">
+            <a:schemeClr val="lt1"/>
+          </a:fontRef>
+        </p:style>
+        <p:txBody>
+          <a:bodyPr rtlCol="0" anchor="ctr"/>
+          <a:lstStyle/>
+          <a:p>
+            <a:pPr algn="ctr"/>
+          </a:p>
+        </p:txBody>
+      </p:sp>
+      <p:sp>
+        <p:nvSpPr>
+          <p:cNvPr id="9" name="Rectangle 8"/>
+          <p:cNvSpPr/>
+          <p:nvPr/>
+        </p:nvSpPr>
+        <p:spPr>
+          <a:xfrm>
+            <a:off x="0" y="0"/>
+            <a:ext cx="12191969" cy="100584"/>
+          </a:xfrm>
+          <a:prstGeom prst="rect">
+            <a:avLst/>
+          </a:prstGeom>
+          <a:solidFill>
+            <a:srgbClr val="F47920"/>
+          </a:solidFill>
+          <a:ln>
+            <a:noFill/>
+          </a:ln>
+          <a:effectLst/>
+        </p:spPr>
+        <p:style>
+          <a:lnRef idx="1">
+            <a:schemeClr val="accent1"/>
+          </a:lnRef>
+          <a:fillRef idx="3">
+            <a:schemeClr val="accent1"/>
+          </a:fillRef>
+          <a:effectRef idx="2">
+            <a:schemeClr val="accent1"/>
+          </a:effectRef>
+          <a:fontRef idx="minor">
+            <a:schemeClr val="lt1"/>
+          </a:fontRef>
+        </p:style>
+        <p:txBody>
+          <a:bodyPr rtlCol="0" anchor="ctr"/>
+          <a:lstStyle/>
+          <a:p>
+            <a:pPr algn="ctr"/>
+          </a:p>
+        </p:txBody>
+      </p:sp>
+      <p:sp>
+        <p:nvSpPr>
+          <p:cNvPr id="2" name="Text 0"/>
+          <p:cNvSpPr txBox="1"/>
+          <p:nvPr/>
+        </p:nvSpPr>
+        <p:spPr>
+          <a:xfrm>
+            <a:off x="621792" y="658368"/>
+            <a:ext cx="6400800" cy="310896"/>
+          </a:xfrm>
+          <a:prstGeom prst="rect">
+            <a:avLst/>
+          </a:prstGeom>
+          <a:noFill/>
+          <a:ln/>
+        </p:spPr>
+        <p:txBody>
+          <a:bodyPr wrap="square" lIns="0" tIns="0" rIns="0" bIns="0" rtlCol="0" anchor="ctr"/>
+          <a:lstStyle/>
+          <a:p>
+            <a:pPr indent="0" marL="0">
+              <a:buNone/>
+            </a:pPr>
+            <a:r>
+              <a:rPr lang="en-US" sz="1200" b="1" spc="300" kern="0" dirty="0">
+                <a:solidFill>
+                  <a:srgbClr val="FFFFFF"/>
+                </a:solidFill>
+                <a:effectLst>
+                  <a:outerShdw blurRad="165100" dist="0" dir="2700000" algn="ctr" rotWithShape="0">
+                    <a:srgbClr val="000000">
+                      <a:alpha val="96000"/>
+                    </a:srgbClr>
+                  </a:outerShdw>
+                </a:effectLst>
+                <a:latin typeface="Trebuchet MS" pitchFamily="34" charset="0"/>
+                <a:ea typeface="Trebuchet MS" pitchFamily="34" charset="-122"/>
+                <a:cs typeface="Trebuchet MS" pitchFamily="34" charset="-120"/>
+              </a:rPr>
+              <a:t>ARCHITECTURE &amp; ATTENTION</a:t>
+            </a:r>
+            <a:endParaRPr lang="en-US" sz="1200" dirty="0"/>
+          </a:p>
+        </p:txBody>
+      </p:sp>
+      <p:sp>
+        <p:nvSpPr>
+          <p:cNvPr id="3" name="Text 1"/>
+          <p:cNvSpPr txBox="1"/>
+          <p:nvPr/>
+        </p:nvSpPr>
+        <p:spPr>
+          <a:xfrm>
+            <a:off x="621792" y="1691640"/>
+            <a:ext cx="10241280" cy="2103120"/>
+          </a:xfrm>
+          <a:prstGeom prst="rect">
+            <a:avLst/>
+          </a:prstGeom>
+          <a:noFill/>
+          <a:ln/>
+        </p:spPr>
+        <p:txBody>
+          <a:bodyPr wrap="square" lIns="0" tIns="0" rIns="0" bIns="0" rtlCol="0" anchor="t"/>
+          <a:lstStyle/>
+          <a:p>
+            <a:pPr indent="0" marL="0">
+              <a:buNone/>
+            </a:pPr>
+            <a:r>
+              <a:rPr lang="en-US" sz="4600" b="1" dirty="0">
+                <a:solidFill>
+                  <a:srgbClr val="FFFFFF"/>
+                </a:solidFill>
+                <a:effectLst>
+                  <a:outerShdw blurRad="254000" dist="0" dir="2700000" algn="ctr" rotWithShape="0">
+                    <a:srgbClr val="000000">
+                      <a:alpha val="92000"/>
+                    </a:srgbClr>
+                  </a:outerShdw>
+                </a:effectLst>
+                <a:latin typeface="Georgia" pitchFamily="34" charset="0"/>
+                <a:ea typeface="Georgia" pitchFamily="34" charset="-122"/>
+                <a:cs typeface="Georgia" pitchFamily="34" charset="-120"/>
+              </a:rPr>
+              <a:t>Who Pays If It’s Wrong?</a:t>
+            </a:r>
+            <a:endParaRPr lang="en-US" sz="4600" dirty="0"/>
+          </a:p>
+        </p:txBody>
+      </p:sp>
+      <p:sp>
+        <p:nvSpPr>
+          <p:cNvPr id="4" name="Text 2"/>
+          <p:cNvSpPr txBox="1"/>
+          <p:nvPr/>
+        </p:nvSpPr>
+        <p:spPr>
+          <a:xfrm>
+            <a:off x="621792" y="3931920"/>
+            <a:ext cx="9692640" cy="1737360"/>
+          </a:xfrm>
+          <a:prstGeom prst="rect">
+            <a:avLst/>
+          </a:prstGeom>
+          <a:noFill/>
+          <a:ln/>
+        </p:spPr>
+        <p:txBody>
+          <a:bodyPr wrap="square" lIns="0" tIns="0" rIns="0" bIns="0" rtlCol="0" anchor="t"/>
+          <a:lstStyle/>
+          <a:p>
+            <a:pPr indent="0" marL="0">
+              <a:lnSpc>
+                <a:spcPct val="130000"/>
+              </a:lnSpc>
+              <a:buNone/>
+            </a:pPr>
+            <a:r>
+              <a:rPr lang="en-US" sz="1700" dirty="0">
+                <a:solidFill>
+                  <a:srgbClr val="FFFFFF"/>
+                </a:solidFill>
+                <a:effectLst>
+                  <a:outerShdw blurRad="165100" dist="0" dir="2700000" algn="ctr" rotWithShape="0">
+                    <a:srgbClr val="000000">
+                      <a:alpha val="96000"/>
+                    </a:srgbClr>
+                  </a:outerShdw>
+                </a:effectLst>
+                <a:latin typeface="Trebuchet MS" pitchFamily="34" charset="0"/>
+                <a:ea typeface="Trebuchet MS" pitchFamily="34" charset="-122"/>
+                <a:cs typeface="Trebuchet MS" pitchFamily="34" charset="-120"/>
+              </a:rPr>
+              <a:t>Hundreds of billions of dollars are riding on a particular bet about how AI gets better. The bet may well come off. This is about what happens to everybody else if it does not.</a:t>
+            </a:r>
+            <a:endParaRPr lang="en-US" sz="1700" dirty="0"/>
+          </a:p>
+        </p:txBody>
+      </p:sp>
       <p:sp>
         <p:nvSpPr>
           <p:cNvPr id="6" name="Text 3"/>
@@ -2937,8 +3048,15 @@
             <a:r>
               <a:rPr lang="en-US" sz="1150" dirty="0">
                 <a:solidFill>
-                  <a:srgbClr val="93A3B5"/>
-                </a:solidFill>
+                  <a:srgbClr val="ECE6DF"/>
+                </a:solidFill>
+                <a:effectLst>
+                  <a:outerShdw blurRad="165100" dist="0" dir="2700000" algn="ctr" rotWithShape="0">
+                    <a:srgbClr val="000000">
+                      <a:alpha val="96000"/>
+                    </a:srgbClr>
+                  </a:outerShdw>
+                </a:effectLst>
                 <a:latin typeface="Trebuchet MS" pitchFamily="34" charset="0"/>
                 <a:ea typeface="Trebuchet MS" pitchFamily="34" charset="-122"/>
                 <a:cs typeface="Trebuchet MS" pitchFamily="34" charset="-120"/>
